--- a/presentations/security-mechanisms-reference.pptx
+++ b/presentations/security-mechanisms-reference.pptx
@@ -15,7 +15,6 @@
     <p:sldId id="263" r:id="rId15"/>
     <p:sldId id="264" r:id="rId16"/>
     <p:sldId id="265" r:id="rId17"/>
-    <p:sldId id="266" r:id="rId18"/>
   </p:sldIdLst>
   <p:sldSz cx="12191695" cy="6858000" type="screen4x3"/>
   <p:notesSz cx="6858000" cy="9144000"/>
@@ -594,86 +593,6 @@
           <a:lstStyle/>
           <a:p>
             <a:r>
-              <a:t>PROPOSED EXERCISE. Use an owned staging application and explicit test authorization. Have a completed finding and a prepared deployed-fix result; do not wait for a full penetration test.</a:t>
-            </a:r>
-          </a:p>
-          <a:p>
-            <a:r>
-              <a:t>Exit: The finding, proposed code change, deployed version and revalidation result are linked. “Not reproduced” is not rewritten as complete security assurance.</a:t>
-            </a:r>
-          </a:p>
-          <a:p>
-            <a:r>
-              <a:t>Fallback: Use previously authorized prepared results and label the demonstration as a walkthrough; no test runs against an unapproved target.</a:t>
-            </a:r>
-          </a:p>
-        </p:txBody>
-      </p:sp>
-      <p:sp>
-        <p:nvSpPr>
-          <p:cNvPr id="4" name="Slide Number Placeholder 3"/>
-          <p:cNvSpPr>
-            <a:spLocks noGrp="1"/>
-          </p:cNvSpPr>
-          <p:nvPr>
-            <p:ph type="sldNum" idx="5" sz="quarter"/>
-          </p:nvPr>
-        </p:nvSpPr>
-        <p:spPr/>
-      </p:sp>
-    </p:spTree>
-  </p:cSld>
-  <p:clrMapOvr>
-    <a:masterClrMapping/>
-  </p:clrMapOvr>
-</p:notes>
-</file>
-
-<file path=ppt/notesSlides/notesSlide11.xml><?xml version="1.0" encoding="utf-8"?>
-<p:notes xmlns:a="http://schemas.openxmlformats.org/drawingml/2006/main" xmlns:p="http://schemas.openxmlformats.org/presentationml/2006/main" xmlns:r="http://schemas.openxmlformats.org/officeDocument/2006/relationships">
-  <p:cSld>
-    <p:spTree>
-      <p:nvGrpSpPr>
-        <p:cNvPr id="1" name=""/>
-        <p:cNvGrpSpPr/>
-        <p:nvPr/>
-      </p:nvGrpSpPr>
-      <p:grpSpPr>
-        <a:xfrm>
-          <a:off x="0" y="0"/>
-          <a:ext cx="0" cy="0"/>
-          <a:chOff x="0" y="0"/>
-          <a:chExt cx="0" cy="0"/>
-        </a:xfrm>
-      </p:grpSpPr>
-      <p:sp>
-        <p:nvSpPr>
-          <p:cNvPr id="2" name="Slide Image Placeholder 1"/>
-          <p:cNvSpPr>
-            <a:spLocks noGrp="1"/>
-          </p:cNvSpPr>
-          <p:nvPr>
-            <p:ph type="sldImg" idx="2"/>
-          </p:nvPr>
-        </p:nvSpPr>
-        <p:spPr/>
-      </p:sp>
-      <p:sp>
-        <p:nvSpPr>
-          <p:cNvPr id="3" name="Notes Placeholder 2"/>
-          <p:cNvSpPr>
-            <a:spLocks noGrp="1"/>
-          </p:cNvSpPr>
-          <p:nvPr>
-            <p:ph type="body" idx="3" sz="quarter"/>
-          </p:nvPr>
-        </p:nvSpPr>
-        <p:spPr/>
-        <p:txBody>
-          <a:bodyPr/>
-          <a:lstStyle/>
-          <a:p>
-            <a:r>
               <a:t>Create a penetration test</a:t>
             </a:r>
           </a:p>
@@ -770,26 +689,6 @@
           <a:p>
             <a:r>
               <a:t>https://docs.aws.amazon.com/securityagent/latest/userguide/revalidate-findings.html</a:t>
-            </a:r>
-          </a:p>
-          <a:p>
-            <a:r>
-              <a:t>Run code security scans from an IDE</a:t>
-            </a:r>
-          </a:p>
-          <a:p>
-            <a:r>
-              <a:t>https://docs.aws.amazon.com/securityagent/latest/userguide/code-review-ide-integration.html</a:t>
-            </a:r>
-          </a:p>
-          <a:p>
-            <a:r>
-              <a:t>MCP configuration</a:t>
-            </a:r>
-          </a:p>
-          <a:p>
-            <a:r>
-              <a:t>https://kiro.dev/docs/mcp/configuration/</a:t>
             </a:r>
           </a:p>
           <a:p/>
@@ -2491,215 +2390,19 @@
           <a:lstStyle/>
           <a:p>
             <a:r>
-              <a:t># AWS Security Agent / AWS Continuum — mechanisms and enablement</a:t>
-            </a:r>
-          </a:p>
-          <a:p/>
-          <a:p>
-            <a:r>
-              <a:t>Reviewed 21 October 2026. Independent checks and examples are proposed; no live workflow was executed.</a:t>
-            </a:r>
-          </a:p>
-          <a:p/>
-          <a:p>
-            <a:r>
-              <a:t>## Mechanism model</a:t>
-            </a:r>
-          </a:p>
-          <a:p/>
-          <a:p>
-            <a:r>
-              <a:t>Additional Learning Resources are application inputs, not evidence of a cross-incident training mechanism. A penetration test can use source code and design information, validate findings, propose repairs and rerun selected checks. Each stage has a different authorization and acceptance boundary.</a:t>
-            </a:r>
-          </a:p>
-          <a:p/>
-          <a:p>
-            <a:r>
-              <a:t>Updated application context → scoped assessment → evidence and findings → reviewed/deployed repair → targeted revalidation. No configurable cross-run incident-memory switch was identified in the reviewed guidance. This is an evidence limitation, not a claim about undisclosed internals.</a:t>
-            </a:r>
-          </a:p>
-          <a:p/>
-          <a:p>
-            <a:r>
-              <a:t>Penetration testing is generally available. Code review, design review and threat modeling are documented as preview; check feature and Region access before setup.</a:t>
-            </a:r>
-          </a:p>
-          <a:p/>
-          <a:p>
-            <a:r>
-              <a:t>## S-M07 — Connect an IDE scan through the Security Agent MCP server</a:t>
-            </a:r>
-          </a:p>
-          <a:p/>
-          <a:p>
-            <a:r>
-              <a:t>**Surface:** Kiro Power / supported IDE integration</a:t>
-            </a:r>
-          </a:p>
-          <a:p/>
-          <a:p>
-            <a:r>
-              <a:t>**Availability:** Code review and threat-model review are preview</a:t>
-            </a:r>
-          </a:p>
-          <a:p/>
-          <a:p>
-            <a:r>
-              <a:t>**Activation:** Install the supported integration; authorize first-use provisioning</a:t>
-            </a:r>
-          </a:p>
-          <a:p/>
-          <a:p>
-            <a:r>
-              <a:t>### Documented mechanism</a:t>
-            </a:r>
-          </a:p>
-          <a:p/>
-          <a:p>
-            <a:r>
-              <a:t>The MCP integration packages code, uploads it to an account S3 bucket, starts a scan and retrieves findings. First use can provision an Agent Space, IAM role and bucket.</a:t>
-            </a:r>
-          </a:p>
-          <a:p/>
-          <a:p>
-            <a:r>
-              <a:t>### Enable and configure</a:t>
-            </a:r>
-          </a:p>
-          <a:p/>
-          <a:p>
-            <a:r>
-              <a:t>Configured AWS credentials with the documented setup and scan permissions; supported client and package runtime.</a:t>
-            </a:r>
-          </a:p>
-          <a:p/>
-          <a:p>
-            <a:r>
-              <a:t>1. Install the AWS Security Agent Power in Kiro, following the official IDE integration procedure.</a:t>
-            </a:r>
-          </a:p>
-          <a:p/>
-          <a:p>
-            <a:r>
-              <a:t>2. Review the AWS profile, Region and setup permissions before first use.</a:t>
-            </a:r>
-          </a:p>
-          <a:p/>
-          <a:p>
-            <a:r>
-              <a:t>3. Request a scan of a disposable repository and inspect the created resources and findings.</a:t>
-            </a:r>
-          </a:p>
-          <a:p/>
-          <a:p>
-            <a:r>
-              <a:t>### Scope and persistence</a:t>
-            </a:r>
-          </a:p>
-          <a:p/>
-          <a:p>
-            <a:r>
-              <a:t>Source leaves the local machine. A differential scan can still upload full repository context with its diff.</a:t>
-            </a:r>
-          </a:p>
-          <a:p/>
-          <a:p>
-            <a:r>
-              <a:t>### Independent checks — proposed</a:t>
-            </a:r>
-          </a:p>
-          <a:p/>
-          <a:p>
-            <a:r>
-              <a:t>- Check the packaged source for secrets and unnecessary content before upload.</a:t>
-            </a:r>
-          </a:p>
-          <a:p/>
-          <a:p>
-            <a:r>
-              <a:t>- Confirm bucket, role, scan ID and source revision; inspect generated fixes before committing.</a:t>
-            </a:r>
-          </a:p>
-          <a:p/>
-          <a:p>
-            <a:r>
-              <a:t>### Record to retain — proposed</a:t>
-            </a:r>
-          </a:p>
-          <a:p/>
-          <a:p>
-            <a:r>
-              <a:t>Redacted integration config, provisioned resources, source manifest, scan result and reviewer decision.</a:t>
-            </a:r>
-          </a:p>
-          <a:p/>
-          <a:p>
-            <a:r>
-              <a:t>### Stop, correct or remove</a:t>
-            </a:r>
-          </a:p>
-          <a:p/>
-          <a:p>
-            <a:r>
-              <a:t>Review installed hooks and MCP tools; remove or disable the integration when access is no longer approved.</a:t>
-            </a:r>
-          </a:p>
-          <a:p/>
-          <a:p>
-            <a:r>
-              <a:t>### Limits and fallback</a:t>
-            </a:r>
-          </a:p>
-          <a:p/>
-          <a:p>
-            <a:r>
-              <a:t>The AWS integration page and current Kiro configuration guide show different manual config paths. Prefer the supported Power setup and inspect the installed configuration rather than copying an older path. No runtime guarantee is assumed.</a:t>
-            </a:r>
-          </a:p>
-          <a:p/>
-          <a:p>
-            <a:r>
-              <a:t>Use the documented console or repository review flow while resolving client-version differences.</a:t>
-            </a:r>
-          </a:p>
-          <a:p/>
-          <a:p>
-            <a:r>
-              <a:t>### Illustrative task — not executed</a:t>
-            </a:r>
-          </a:p>
-          <a:p/>
-          <a:p>
-            <a:r>
-              <a:t>Illustrative: scan a small synthetic repository containing no credentials or customer data, without requesting fixes.</a:t>
-            </a:r>
-          </a:p>
-          <a:p/>
-          <a:p>
-            <a:r>
-              <a:t>### Official guidance</a:t>
-            </a:r>
-          </a:p>
-          <a:p/>
-          <a:p>
-            <a:r>
-              <a:t>[SI: Run code security scans from an IDE](https://docs.aws.amazon.com/securityagent/latest/userguide/code-review-ide-integration.html)</a:t>
-            </a:r>
-          </a:p>
-          <a:p/>
-          <a:p>
-            <a:r>
-              <a:t>[KC: MCP configuration](https://kiro.dev/docs/mcp/configuration/)</a:t>
-            </a:r>
-          </a:p>
-          <a:p/>
-          <a:p>
-            <a:r>
-              <a:t>[SB: Pricing and preview capability status](https://docs.aws.amazon.com/securityagent/latest/userguide/pricing.html)</a:t>
-            </a:r>
-          </a:p>
-          <a:p/>
-          <a:p/>
+              <a:t>PROPOSED EXERCISE. Use an owned staging application and explicit test authorization. Have a completed finding and a prepared deployed-fix result; do not wait for a full penetration test.</a:t>
+            </a:r>
+          </a:p>
+          <a:p>
+            <a:r>
+              <a:t>Exit: The finding, proposed code change, deployed version and revalidation result are linked. “Not reproduced” is not rewritten as complete security assurance.</a:t>
+            </a:r>
+          </a:p>
+          <a:p>
+            <a:r>
+              <a:t>Fallback: Use previously authorized prepared results and label the demonstration as a walkthrough; no test runs against an unapproved target.</a:t>
+            </a:r>
+          </a:p>
         </p:txBody>
       </p:sp>
       <p:sp>
@@ -6465,7 +6168,7 @@
               </a:defRPr>
             </a:pPr>
             <a:r>
-              <a:t>OPTIONAL 12-MINUTE EXERCISE / PART 2 OF 2</a:t>
+              <a:t>OFFICIAL DOCUMENTATION</a:t>
             </a:r>
           </a:p>
         </p:txBody>
@@ -6504,7 +6207,7 @@
               </a:defRPr>
             </a:pPr>
             <a:r>
-              <a:t>Carry application evidence through repair and revalidation</a:t>
+              <a:t>Evidence and delivery boundary</a:t>
             </a:r>
           </a:p>
         </p:txBody>
@@ -6632,754 +6335,6 @@
       </p:sp>
       <p:sp>
         <p:nvSpPr>
-          <p:cNvPr id="8" name="Rectangle 7"/>
-          <p:cNvSpPr/>
-          <p:nvPr/>
-        </p:nvSpPr>
-        <p:spPr>
-          <a:xfrm>
-            <a:off x="502920" y="1828800"/>
-            <a:ext cx="11183112" cy="1234440"/>
-          </a:xfrm>
-          <a:prstGeom prst="rect">
-            <a:avLst/>
-          </a:prstGeom>
-          <a:solidFill>
-            <a:srgbClr val="F1F5F9"/>
-          </a:solidFill>
-          <a:ln>
-            <a:noFill/>
-          </a:ln>
-        </p:spPr>
-        <p:style>
-          <a:lnRef idx="1">
-            <a:schemeClr val="accent1"/>
-          </a:lnRef>
-          <a:fillRef idx="3">
-            <a:schemeClr val="accent1"/>
-          </a:fillRef>
-          <a:effectRef idx="2">
-            <a:schemeClr val="accent1"/>
-          </a:effectRef>
-          <a:fontRef idx="minor">
-            <a:schemeClr val="lt1"/>
-          </a:fontRef>
-        </p:style>
-        <p:txBody>
-          <a:bodyPr rtlCol="0" anchor="ctr"/>
-          <a:lstStyle/>
-          <a:p>
-            <a:pPr algn="ctr"/>
-          </a:p>
-        </p:txBody>
-      </p:sp>
-      <p:sp>
-        <p:nvSpPr>
-          <p:cNvPr id="9" name="TextBox 8"/>
-          <p:cNvSpPr txBox="1"/>
-          <p:nvPr/>
-        </p:nvSpPr>
-        <p:spPr>
-          <a:xfrm>
-            <a:off x="694944" y="1993392"/>
-            <a:ext cx="1325880" cy="301752"/>
-          </a:xfrm>
-          <a:prstGeom prst="rect">
-            <a:avLst/>
-          </a:prstGeom>
-          <a:noFill/>
-        </p:spPr>
-        <p:txBody>
-          <a:bodyPr wrap="square" lIns="0" rIns="0" tIns="0" bIns="0">
-            <a:spAutoFit/>
-          </a:bodyPr>
-          <a:lstStyle/>
-          <a:p>
-            <a:pPr>
-              <a:spcAft>
-                <a:spcPts val="600"/>
-              </a:spcAft>
-              <a:defRPr sz="1600" b="1">
-                <a:solidFill>
-                  <a:srgbClr val="24734A"/>
-                </a:solidFill>
-                <a:latin typeface="Aptos"/>
-              </a:defRPr>
-            </a:pPr>
-            <a:r>
-              <a:t>05:30–07:30</a:t>
-            </a:r>
-          </a:p>
-        </p:txBody>
-      </p:sp>
-      <p:sp>
-        <p:nvSpPr>
-          <p:cNvPr id="10" name="TextBox 9"/>
-          <p:cNvSpPr txBox="1"/>
-          <p:nvPr/>
-        </p:nvSpPr>
-        <p:spPr>
-          <a:xfrm>
-            <a:off x="2130552" y="1938528"/>
-            <a:ext cx="9281160" cy="301752"/>
-          </a:xfrm>
-          <a:prstGeom prst="rect">
-            <a:avLst/>
-          </a:prstGeom>
-          <a:noFill/>
-        </p:spPr>
-        <p:txBody>
-          <a:bodyPr wrap="square" lIns="0" rIns="0" tIns="0" bIns="0">
-            <a:spAutoFit/>
-          </a:bodyPr>
-          <a:lstStyle/>
-          <a:p>
-            <a:pPr>
-              <a:spcAft>
-                <a:spcPts val="600"/>
-              </a:spcAft>
-              <a:defRPr sz="2000" b="1">
-                <a:solidFill>
-                  <a:srgbClr val="182D43"/>
-                </a:solidFill>
-                <a:latin typeface="Aptos"/>
-              </a:defRPr>
-            </a:pPr>
-            <a:r>
-              <a:t>Inspect remediation setup</a:t>
-            </a:r>
-          </a:p>
-        </p:txBody>
-      </p:sp>
-      <p:sp>
-        <p:nvSpPr>
-          <p:cNvPr id="11" name="TextBox 10"/>
-          <p:cNvSpPr txBox="1"/>
-          <p:nvPr/>
-        </p:nvSpPr>
-        <p:spPr>
-          <a:xfrm>
-            <a:off x="2130552" y="2331720"/>
-            <a:ext cx="9189720" cy="621792"/>
-          </a:xfrm>
-          <a:prstGeom prst="rect">
-            <a:avLst/>
-          </a:prstGeom>
-          <a:noFill/>
-        </p:spPr>
-        <p:txBody>
-          <a:bodyPr wrap="square" lIns="0" rIns="0" tIns="0" bIns="0">
-            <a:spAutoFit/>
-          </a:bodyPr>
-          <a:lstStyle/>
-          <a:p>
-            <a:pPr>
-              <a:spcAft>
-                <a:spcPts val="600"/>
-              </a:spcAft>
-              <a:defRPr sz="1600" b="0">
-                <a:solidFill>
-                  <a:srgbClr val="182D43"/>
-                </a:solidFill>
-                <a:latin typeface="Aptos"/>
-              </a:defRPr>
-            </a:pPr>
-            <a:r>
-              <a:t>Check per-repository enablement and inspect the proposed repair. Gate: Finding-linked PR, no merge implied.</a:t>
-            </a:r>
-          </a:p>
-        </p:txBody>
-      </p:sp>
-      <p:sp>
-        <p:nvSpPr>
-          <p:cNvPr id="12" name="Rectangle 11"/>
-          <p:cNvSpPr/>
-          <p:nvPr/>
-        </p:nvSpPr>
-        <p:spPr>
-          <a:xfrm>
-            <a:off x="502920" y="3227832"/>
-            <a:ext cx="11183112" cy="1234440"/>
-          </a:xfrm>
-          <a:prstGeom prst="rect">
-            <a:avLst/>
-          </a:prstGeom>
-          <a:solidFill>
-            <a:srgbClr val="F1F5F9"/>
-          </a:solidFill>
-          <a:ln>
-            <a:noFill/>
-          </a:ln>
-        </p:spPr>
-        <p:style>
-          <a:lnRef idx="1">
-            <a:schemeClr val="accent1"/>
-          </a:lnRef>
-          <a:fillRef idx="3">
-            <a:schemeClr val="accent1"/>
-          </a:fillRef>
-          <a:effectRef idx="2">
-            <a:schemeClr val="accent1"/>
-          </a:effectRef>
-          <a:fontRef idx="minor">
-            <a:schemeClr val="lt1"/>
-          </a:fontRef>
-        </p:style>
-        <p:txBody>
-          <a:bodyPr rtlCol="0" anchor="ctr"/>
-          <a:lstStyle/>
-          <a:p>
-            <a:pPr algn="ctr"/>
-          </a:p>
-        </p:txBody>
-      </p:sp>
-      <p:sp>
-        <p:nvSpPr>
-          <p:cNvPr id="13" name="TextBox 12"/>
-          <p:cNvSpPr txBox="1"/>
-          <p:nvPr/>
-        </p:nvSpPr>
-        <p:spPr>
-          <a:xfrm>
-            <a:off x="694944" y="3392424"/>
-            <a:ext cx="1325880" cy="301752"/>
-          </a:xfrm>
-          <a:prstGeom prst="rect">
-            <a:avLst/>
-          </a:prstGeom>
-          <a:noFill/>
-        </p:spPr>
-        <p:txBody>
-          <a:bodyPr wrap="square" lIns="0" rIns="0" tIns="0" bIns="0">
-            <a:spAutoFit/>
-          </a:bodyPr>
-          <a:lstStyle/>
-          <a:p>
-            <a:pPr>
-              <a:spcAft>
-                <a:spcPts val="600"/>
-              </a:spcAft>
-              <a:defRPr sz="1600" b="1">
-                <a:solidFill>
-                  <a:srgbClr val="24734A"/>
-                </a:solidFill>
-                <a:latin typeface="Aptos"/>
-              </a:defRPr>
-            </a:pPr>
-            <a:r>
-              <a:t>07:30–09:00</a:t>
-            </a:r>
-          </a:p>
-        </p:txBody>
-      </p:sp>
-      <p:sp>
-        <p:nvSpPr>
-          <p:cNvPr id="14" name="TextBox 13"/>
-          <p:cNvSpPr txBox="1"/>
-          <p:nvPr/>
-        </p:nvSpPr>
-        <p:spPr>
-          <a:xfrm>
-            <a:off x="2130552" y="3337560"/>
-            <a:ext cx="9281160" cy="301752"/>
-          </a:xfrm>
-          <a:prstGeom prst="rect">
-            <a:avLst/>
-          </a:prstGeom>
-          <a:noFill/>
-        </p:spPr>
-        <p:txBody>
-          <a:bodyPr wrap="square" lIns="0" rIns="0" tIns="0" bIns="0">
-            <a:spAutoFit/>
-          </a:bodyPr>
-          <a:lstStyle/>
-          <a:p>
-            <a:pPr>
-              <a:spcAft>
-                <a:spcPts val="600"/>
-              </a:spcAft>
-              <a:defRPr sz="2000" b="1">
-                <a:solidFill>
-                  <a:srgbClr val="182D43"/>
-                </a:solidFill>
-                <a:latin typeface="Aptos"/>
-              </a:defRPr>
-            </a:pPr>
-            <a:r>
-              <a:t>Verify the deployed version</a:t>
-            </a:r>
-          </a:p>
-        </p:txBody>
-      </p:sp>
-      <p:sp>
-        <p:nvSpPr>
-          <p:cNvPr id="15" name="TextBox 14"/>
-          <p:cNvSpPr txBox="1"/>
-          <p:nvPr/>
-        </p:nvSpPr>
-        <p:spPr>
-          <a:xfrm>
-            <a:off x="2130552" y="3730752"/>
-            <a:ext cx="9189720" cy="621792"/>
-          </a:xfrm>
-          <a:prstGeom prst="rect">
-            <a:avLst/>
-          </a:prstGeom>
-          <a:noFill/>
-        </p:spPr>
-        <p:txBody>
-          <a:bodyPr wrap="square" lIns="0" rIns="0" tIns="0" bIns="0">
-            <a:spAutoFit/>
-          </a:bodyPr>
-          <a:lstStyle/>
-          <a:p>
-            <a:pPr>
-              <a:spcAft>
-                <a:spcPts val="600"/>
-              </a:spcAft>
-              <a:defRPr sz="1600" b="0">
-                <a:solidFill>
-                  <a:srgbClr val="182D43"/>
-                </a:solidFill>
-                <a:latin typeface="Aptos"/>
-              </a:defRPr>
-            </a:pPr>
-            <a:r>
-              <a:t>Use the normal change process and confirm the staging commit. Gate: Independent tests and deployed revision recorded.</a:t>
-            </a:r>
-          </a:p>
-        </p:txBody>
-      </p:sp>
-      <p:sp>
-        <p:nvSpPr>
-          <p:cNvPr id="16" name="Rectangle 15"/>
-          <p:cNvSpPr/>
-          <p:nvPr/>
-        </p:nvSpPr>
-        <p:spPr>
-          <a:xfrm>
-            <a:off x="502920" y="4626864"/>
-            <a:ext cx="11183112" cy="1234440"/>
-          </a:xfrm>
-          <a:prstGeom prst="rect">
-            <a:avLst/>
-          </a:prstGeom>
-          <a:solidFill>
-            <a:srgbClr val="F1F5F9"/>
-          </a:solidFill>
-          <a:ln>
-            <a:noFill/>
-          </a:ln>
-        </p:spPr>
-        <p:style>
-          <a:lnRef idx="1">
-            <a:schemeClr val="accent1"/>
-          </a:lnRef>
-          <a:fillRef idx="3">
-            <a:schemeClr val="accent1"/>
-          </a:fillRef>
-          <a:effectRef idx="2">
-            <a:schemeClr val="accent1"/>
-          </a:effectRef>
-          <a:fontRef idx="minor">
-            <a:schemeClr val="lt1"/>
-          </a:fontRef>
-        </p:style>
-        <p:txBody>
-          <a:bodyPr rtlCol="0" anchor="ctr"/>
-          <a:lstStyle/>
-          <a:p>
-            <a:pPr algn="ctr"/>
-          </a:p>
-        </p:txBody>
-      </p:sp>
-      <p:sp>
-        <p:nvSpPr>
-          <p:cNvPr id="17" name="TextBox 16"/>
-          <p:cNvSpPr txBox="1"/>
-          <p:nvPr/>
-        </p:nvSpPr>
-        <p:spPr>
-          <a:xfrm>
-            <a:off x="694944" y="4791456"/>
-            <a:ext cx="1325880" cy="301752"/>
-          </a:xfrm>
-          <a:prstGeom prst="rect">
-            <a:avLst/>
-          </a:prstGeom>
-          <a:noFill/>
-        </p:spPr>
-        <p:txBody>
-          <a:bodyPr wrap="square" lIns="0" rIns="0" tIns="0" bIns="0">
-            <a:spAutoFit/>
-          </a:bodyPr>
-          <a:lstStyle/>
-          <a:p>
-            <a:pPr>
-              <a:spcAft>
-                <a:spcPts val="600"/>
-              </a:spcAft>
-              <a:defRPr sz="1600" b="1">
-                <a:solidFill>
-                  <a:srgbClr val="24734A"/>
-                </a:solidFill>
-                <a:latin typeface="Aptos"/>
-              </a:defRPr>
-            </a:pPr>
-            <a:r>
-              <a:t>09:00–12:00</a:t>
-            </a:r>
-          </a:p>
-        </p:txBody>
-      </p:sp>
-      <p:sp>
-        <p:nvSpPr>
-          <p:cNvPr id="18" name="TextBox 17"/>
-          <p:cNvSpPr txBox="1"/>
-          <p:nvPr/>
-        </p:nvSpPr>
-        <p:spPr>
-          <a:xfrm>
-            <a:off x="2130552" y="4736592"/>
-            <a:ext cx="9281160" cy="301752"/>
-          </a:xfrm>
-          <a:prstGeom prst="rect">
-            <a:avLst/>
-          </a:prstGeom>
-          <a:noFill/>
-        </p:spPr>
-        <p:txBody>
-          <a:bodyPr wrap="square" lIns="0" rIns="0" tIns="0" bIns="0">
-            <a:spAutoFit/>
-          </a:bodyPr>
-          <a:lstStyle/>
-          <a:p>
-            <a:pPr>
-              <a:spcAft>
-                <a:spcPts val="600"/>
-              </a:spcAft>
-              <a:defRPr sz="2000" b="1">
-                <a:solidFill>
-                  <a:srgbClr val="182D43"/>
-                </a:solidFill>
-                <a:latin typeface="Aptos"/>
-              </a:defRPr>
-            </a:pPr>
-            <a:r>
-              <a:t>Revalidate and record residual risk</a:t>
-            </a:r>
-          </a:p>
-        </p:txBody>
-      </p:sp>
-      <p:sp>
-        <p:nvSpPr>
-          <p:cNvPr id="19" name="TextBox 18"/>
-          <p:cNvSpPr txBox="1"/>
-          <p:nvPr/>
-        </p:nvSpPr>
-        <p:spPr>
-          <a:xfrm>
-            <a:off x="2130552" y="5129784"/>
-            <a:ext cx="9189720" cy="621792"/>
-          </a:xfrm>
-          <a:prstGeom prst="rect">
-            <a:avLst/>
-          </a:prstGeom>
-          <a:noFill/>
-        </p:spPr>
-        <p:txBody>
-          <a:bodyPr wrap="square" lIns="0" rIns="0" tIns="0" bIns="0">
-            <a:spAutoFit/>
-          </a:bodyPr>
-          <a:lstStyle/>
-          <a:p>
-            <a:pPr>
-              <a:spcAft>
-                <a:spcPts val="600"/>
-              </a:spcAft>
-              <a:defRPr sz="1600" b="0">
-                <a:solidFill>
-                  <a:srgbClr val="182D43"/>
-                </a:solidFill>
-                <a:latin typeface="Aptos"/>
-              </a:defRPr>
-            </a:pPr>
-            <a:r>
-              <a:t>Review the targeted revalidation job and original finding together. Gate: Reachable target, correct identity and evidence for the result.</a:t>
-            </a:r>
-          </a:p>
-        </p:txBody>
-      </p:sp>
-    </p:spTree>
-  </p:cSld>
-  <p:clrMapOvr>
-    <a:masterClrMapping/>
-  </p:clrMapOvr>
-</p:sld>
-</file>
-
-<file path=ppt/slides/slide11.xml><?xml version="1.0" encoding="utf-8"?>
-<p:sld xmlns:a="http://schemas.openxmlformats.org/drawingml/2006/main" xmlns:p="http://schemas.openxmlformats.org/presentationml/2006/main" xmlns:r="http://schemas.openxmlformats.org/officeDocument/2006/relationships">
-  <p:cSld>
-    <p:bg>
-      <p:bgPr>
-        <a:solidFill>
-          <a:srgbClr val="FFFFFF"/>
-        </a:solidFill>
-        <a:effectLst/>
-      </p:bgPr>
-    </p:bg>
-    <p:spTree>
-      <p:nvGrpSpPr>
-        <p:cNvPr id="1" name=""/>
-        <p:cNvGrpSpPr/>
-        <p:nvPr/>
-      </p:nvGrpSpPr>
-      <p:grpSpPr/>
-      <p:sp>
-        <p:nvSpPr>
-          <p:cNvPr id="2" name="Rectangle 1"/>
-          <p:cNvSpPr/>
-          <p:nvPr/>
-        </p:nvSpPr>
-        <p:spPr>
-          <a:xfrm>
-            <a:off x="0" y="0"/>
-            <a:ext cx="12191695" cy="128016"/>
-          </a:xfrm>
-          <a:prstGeom prst="rect">
-            <a:avLst/>
-          </a:prstGeom>
-          <a:solidFill>
-            <a:srgbClr val="24734A"/>
-          </a:solidFill>
-          <a:ln>
-            <a:noFill/>
-          </a:ln>
-        </p:spPr>
-        <p:style>
-          <a:lnRef idx="1">
-            <a:schemeClr val="accent1"/>
-          </a:lnRef>
-          <a:fillRef idx="3">
-            <a:schemeClr val="accent1"/>
-          </a:fillRef>
-          <a:effectRef idx="2">
-            <a:schemeClr val="accent1"/>
-          </a:effectRef>
-          <a:fontRef idx="minor">
-            <a:schemeClr val="lt1"/>
-          </a:fontRef>
-        </p:style>
-        <p:txBody>
-          <a:bodyPr rtlCol="0" anchor="ctr"/>
-          <a:lstStyle/>
-          <a:p>
-            <a:pPr algn="ctr"/>
-          </a:p>
-        </p:txBody>
-      </p:sp>
-      <p:sp>
-        <p:nvSpPr>
-          <p:cNvPr id="3" name="TextBox 2"/>
-          <p:cNvSpPr txBox="1"/>
-          <p:nvPr/>
-        </p:nvSpPr>
-        <p:spPr>
-          <a:xfrm>
-            <a:off x="502920" y="347472"/>
-            <a:ext cx="11155680" cy="256032"/>
-          </a:xfrm>
-          <a:prstGeom prst="rect">
-            <a:avLst/>
-          </a:prstGeom>
-          <a:noFill/>
-        </p:spPr>
-        <p:txBody>
-          <a:bodyPr wrap="square" lIns="0" rIns="0" tIns="0" bIns="0">
-            <a:spAutoFit/>
-          </a:bodyPr>
-          <a:lstStyle/>
-          <a:p>
-            <a:pPr>
-              <a:spcAft>
-                <a:spcPts val="600"/>
-              </a:spcAft>
-              <a:defRPr sz="1100" b="1">
-                <a:solidFill>
-                  <a:srgbClr val="24734A"/>
-                </a:solidFill>
-                <a:latin typeface="Aptos"/>
-              </a:defRPr>
-            </a:pPr>
-            <a:r>
-              <a:t>OFFICIAL DOCUMENTATION</a:t>
-            </a:r>
-          </a:p>
-        </p:txBody>
-      </p:sp>
-      <p:sp>
-        <p:nvSpPr>
-          <p:cNvPr id="4" name="TextBox 3"/>
-          <p:cNvSpPr txBox="1"/>
-          <p:nvPr/>
-        </p:nvSpPr>
-        <p:spPr>
-          <a:xfrm>
-            <a:off x="502920" y="777240"/>
-            <a:ext cx="11155680" cy="868680"/>
-          </a:xfrm>
-          <a:prstGeom prst="rect">
-            <a:avLst/>
-          </a:prstGeom>
-          <a:noFill/>
-        </p:spPr>
-        <p:txBody>
-          <a:bodyPr wrap="square" lIns="0" rIns="0" tIns="0" bIns="0">
-            <a:spAutoFit/>
-          </a:bodyPr>
-          <a:lstStyle/>
-          <a:p>
-            <a:pPr>
-              <a:spcAft>
-                <a:spcPts val="600"/>
-              </a:spcAft>
-              <a:defRPr sz="2900" b="1">
-                <a:solidFill>
-                  <a:srgbClr val="182D43"/>
-                </a:solidFill>
-                <a:latin typeface="Aptos"/>
-              </a:defRPr>
-            </a:pPr>
-            <a:r>
-              <a:t>Evidence and delivery boundary</a:t>
-            </a:r>
-          </a:p>
-        </p:txBody>
-      </p:sp>
-      <p:sp>
-        <p:nvSpPr>
-          <p:cNvPr id="5" name="Rectangle 4"/>
-          <p:cNvSpPr/>
-          <p:nvPr/>
-        </p:nvSpPr>
-        <p:spPr>
-          <a:xfrm>
-            <a:off x="502920" y="6473952"/>
-            <a:ext cx="11155680" cy="10972"/>
-          </a:xfrm>
-          <a:prstGeom prst="rect">
-            <a:avLst/>
-          </a:prstGeom>
-          <a:solidFill>
-            <a:srgbClr val="D4DFE9"/>
-          </a:solidFill>
-          <a:ln>
-            <a:noFill/>
-          </a:ln>
-        </p:spPr>
-        <p:style>
-          <a:lnRef idx="1">
-            <a:schemeClr val="accent1"/>
-          </a:lnRef>
-          <a:fillRef idx="3">
-            <a:schemeClr val="accent1"/>
-          </a:fillRef>
-          <a:effectRef idx="2">
-            <a:schemeClr val="accent1"/>
-          </a:effectRef>
-          <a:fontRef idx="minor">
-            <a:schemeClr val="lt1"/>
-          </a:fontRef>
-        </p:style>
-        <p:txBody>
-          <a:bodyPr rtlCol="0" anchor="ctr"/>
-          <a:lstStyle/>
-          <a:p>
-            <a:pPr algn="ctr"/>
-          </a:p>
-        </p:txBody>
-      </p:sp>
-      <p:sp>
-        <p:nvSpPr>
-          <p:cNvPr id="6" name="TextBox 5"/>
-          <p:cNvSpPr txBox="1"/>
-          <p:nvPr/>
-        </p:nvSpPr>
-        <p:spPr>
-          <a:xfrm>
-            <a:off x="502920" y="6565392"/>
-            <a:ext cx="9601200" cy="182880"/>
-          </a:xfrm>
-          <a:prstGeom prst="rect">
-            <a:avLst/>
-          </a:prstGeom>
-          <a:noFill/>
-        </p:spPr>
-        <p:txBody>
-          <a:bodyPr wrap="square" lIns="0" rIns="0" tIns="0" bIns="0">
-            <a:spAutoFit/>
-          </a:bodyPr>
-          <a:lstStyle/>
-          <a:p>
-            <a:pPr>
-              <a:spcAft>
-                <a:spcPts val="600"/>
-              </a:spcAft>
-              <a:defRPr sz="900" b="0">
-                <a:solidFill>
-                  <a:srgbClr val="52657A"/>
-                </a:solidFill>
-                <a:latin typeface="Aptos"/>
-              </a:defRPr>
-            </a:pPr>
-            <a:r>
-              <a:t>AWS Security Agent / AWS Continuum | Mechanism reference | 21 Oct 2026</a:t>
-            </a:r>
-          </a:p>
-        </p:txBody>
-      </p:sp>
-      <p:sp>
-        <p:nvSpPr>
-          <p:cNvPr id="7" name="TextBox 6"/>
-          <p:cNvSpPr txBox="1"/>
-          <p:nvPr/>
-        </p:nvSpPr>
-        <p:spPr>
-          <a:xfrm>
-            <a:off x="10149840" y="6565392"/>
-            <a:ext cx="1554480" cy="182880"/>
-          </a:xfrm>
-          <a:prstGeom prst="rect">
-            <a:avLst/>
-          </a:prstGeom>
-          <a:noFill/>
-        </p:spPr>
-        <p:txBody>
-          <a:bodyPr wrap="square" lIns="0" rIns="0" tIns="0" bIns="0">
-            <a:spAutoFit/>
-          </a:bodyPr>
-          <a:lstStyle/>
-          <a:p>
-            <a:pPr>
-              <a:spcAft>
-                <a:spcPts val="600"/>
-              </a:spcAft>
-              <a:defRPr sz="900" b="0">
-                <a:solidFill>
-                  <a:srgbClr val="52657A"/>
-                </a:solidFill>
-                <a:latin typeface="Aptos"/>
-              </a:defRPr>
-            </a:pPr>
-            <a:r>
-              <a:t>11 / UNTIMED</a:t>
-            </a:r>
-          </a:p>
-        </p:txBody>
-      </p:sp>
-      <p:sp>
-        <p:nvSpPr>
           <p:cNvPr id="8" name="TextBox 7"/>
           <p:cNvSpPr txBox="1"/>
           <p:nvPr/>
@@ -7840,90 +6795,6 @@
       <p:sp>
         <p:nvSpPr>
           <p:cNvPr id="19" name="TextBox 18"/>
-          <p:cNvSpPr txBox="1"/>
-          <p:nvPr/>
-        </p:nvSpPr>
-        <p:spPr>
-          <a:xfrm>
-            <a:off x="594360" y="4251960"/>
-            <a:ext cx="5394960" cy="283464"/>
-          </a:xfrm>
-          <a:prstGeom prst="rect">
-            <a:avLst/>
-          </a:prstGeom>
-          <a:noFill/>
-        </p:spPr>
-        <p:txBody>
-          <a:bodyPr wrap="square" lIns="0" rIns="0" tIns="0" bIns="0">
-            <a:spAutoFit/>
-          </a:bodyPr>
-          <a:lstStyle/>
-          <a:p>
-            <a:pPr>
-              <a:spcAft>
-                <a:spcPts val="600"/>
-              </a:spcAft>
-              <a:defRPr sz="1300" b="0">
-                <a:solidFill>
-                  <a:srgbClr val="24734A"/>
-                </a:solidFill>
-                <a:latin typeface="Aptos"/>
-              </a:defRPr>
-            </a:pPr>
-            <a:r>
-              <a:rPr>
-                <a:hlinkClick r:id="rId13"/>
-              </a:rPr>
-              <a:t>[SI] Run code security scans from an IDE</a:t>
-            </a:r>
-          </a:p>
-        </p:txBody>
-      </p:sp>
-      <p:sp>
-        <p:nvSpPr>
-          <p:cNvPr id="20" name="TextBox 19"/>
-          <p:cNvSpPr txBox="1"/>
-          <p:nvPr/>
-        </p:nvSpPr>
-        <p:spPr>
-          <a:xfrm>
-            <a:off x="6263640" y="4251960"/>
-            <a:ext cx="5394960" cy="283464"/>
-          </a:xfrm>
-          <a:prstGeom prst="rect">
-            <a:avLst/>
-          </a:prstGeom>
-          <a:noFill/>
-        </p:spPr>
-        <p:txBody>
-          <a:bodyPr wrap="square" lIns="0" rIns="0" tIns="0" bIns="0">
-            <a:spAutoFit/>
-          </a:bodyPr>
-          <a:lstStyle/>
-          <a:p>
-            <a:pPr>
-              <a:spcAft>
-                <a:spcPts val="600"/>
-              </a:spcAft>
-              <a:defRPr sz="1300" b="0">
-                <a:solidFill>
-                  <a:srgbClr val="24734A"/>
-                </a:solidFill>
-                <a:latin typeface="Aptos"/>
-              </a:defRPr>
-            </a:pPr>
-            <a:r>
-              <a:rPr>
-                <a:hlinkClick r:id="rId14"/>
-              </a:rPr>
-              <a:t>[KC] MCP configuration</a:t>
-            </a:r>
-          </a:p>
-        </p:txBody>
-      </p:sp>
-      <p:sp>
-        <p:nvSpPr>
-          <p:cNvPr id="21" name="TextBox 20"/>
           <p:cNvSpPr txBox="1"/>
           <p:nvPr/>
         </p:nvSpPr>
@@ -13001,7 +11872,7 @@
               </a:defRPr>
             </a:pPr>
             <a:r>
-              <a:t>S-M07 / INTEGRATION</a:t>
+              <a:t>OPTIONAL 12-MINUTE EXERCISE / PART 1 OF 2</a:t>
             </a:r>
           </a:p>
         </p:txBody>
@@ -13040,7 +11911,7 @@
               </a:defRPr>
             </a:pPr>
             <a:r>
-              <a:t>Connect an IDE scan through the Security Agent MCP server</a:t>
+              <a:t>Carry application evidence through repair and revalidation</a:t>
             </a:r>
           </a:p>
         </p:txBody>
@@ -13174,8 +12045,8 @@
         </p:nvSpPr>
         <p:spPr>
           <a:xfrm>
-            <a:off x="502920" y="1810512"/>
-            <a:ext cx="5486400" cy="1929384"/>
+            <a:off x="502920" y="1828800"/>
+            <a:ext cx="11183112" cy="1234440"/>
           </a:xfrm>
           <a:prstGeom prst="rect">
             <a:avLst/>
@@ -13217,8 +12088,8 @@
         </p:nvSpPr>
         <p:spPr>
           <a:xfrm>
-            <a:off x="685800" y="1947672"/>
-            <a:ext cx="5120640" cy="228600"/>
+            <a:off x="694944" y="1993392"/>
+            <a:ext cx="1325880" cy="301752"/>
           </a:xfrm>
           <a:prstGeom prst="rect">
             <a:avLst/>
@@ -13235,7 +12106,7 @@
               <a:spcAft>
                 <a:spcPts val="600"/>
               </a:spcAft>
-              <a:defRPr sz="1100" b="1">
+              <a:defRPr sz="1600" b="1">
                 <a:solidFill>
                   <a:srgbClr val="24734A"/>
                 </a:solidFill>
@@ -13243,7 +12114,7 @@
               </a:defRPr>
             </a:pPr>
             <a:r>
-              <a:t>DOCUMENTED OPERATION</a:t>
+              <a:t>00:00–02:00</a:t>
             </a:r>
           </a:p>
         </p:txBody>
@@ -13256,8 +12127,8 @@
         </p:nvSpPr>
         <p:spPr>
           <a:xfrm>
-            <a:off x="685800" y="2313432"/>
-            <a:ext cx="5120640" cy="1316736"/>
+            <a:off x="2130552" y="1938528"/>
+            <a:ext cx="9281160" cy="301752"/>
           </a:xfrm>
           <a:prstGeom prst="rect">
             <a:avLst/>
@@ -13274,7 +12145,7 @@
               <a:spcAft>
                 <a:spcPts val="600"/>
               </a:spcAft>
-              <a:defRPr sz="1800" b="0">
+              <a:defRPr sz="2000" b="1">
                 <a:solidFill>
                   <a:srgbClr val="182D43"/>
                 </a:solidFill>
@@ -13282,21 +12153,60 @@
               </a:defRPr>
             </a:pPr>
             <a:r>
-              <a:t>The MCP integration packages code, uploads it to an account S3 bucket, starts a scan and retrieves findings.</a:t>
-            </a:r>
-          </a:p>
-        </p:txBody>
-      </p:sp>
-      <p:sp>
-        <p:nvSpPr>
-          <p:cNvPr id="11" name="Rectangle 10"/>
+              <a:t>Fix the authorization boundary</a:t>
+            </a:r>
+          </a:p>
+        </p:txBody>
+      </p:sp>
+      <p:sp>
+        <p:nvSpPr>
+          <p:cNvPr id="11" name="TextBox 10"/>
+          <p:cNvSpPr txBox="1"/>
+          <p:nvPr/>
+        </p:nvSpPr>
+        <p:spPr>
+          <a:xfrm>
+            <a:off x="2130552" y="2331720"/>
+            <a:ext cx="9189720" cy="621792"/>
+          </a:xfrm>
+          <a:prstGeom prst="rect">
+            <a:avLst/>
+          </a:prstGeom>
+          <a:noFill/>
+        </p:spPr>
+        <p:txBody>
+          <a:bodyPr wrap="square" lIns="0" rIns="0" tIns="0" bIns="0">
+            <a:spAutoFit/>
+          </a:bodyPr>
+          <a:lstStyle/>
+          <a:p>
+            <a:pPr>
+              <a:spcAft>
+                <a:spcPts val="600"/>
+              </a:spcAft>
+              <a:defRPr sz="1600" b="0">
+                <a:solidFill>
+                  <a:srgbClr val="182D43"/>
+                </a:solidFill>
+                <a:latin typeface="Aptos"/>
+              </a:defRPr>
+            </a:pPr>
+            <a:r>
+              <a:t>Identify the test target, identities, exclusions and stop owner. Gate: Written scope and approved test roles.</a:t>
+            </a:r>
+          </a:p>
+        </p:txBody>
+      </p:sp>
+      <p:sp>
+        <p:nvSpPr>
+          <p:cNvPr id="12" name="Rectangle 11"/>
           <p:cNvSpPr/>
           <p:nvPr/>
         </p:nvSpPr>
         <p:spPr>
           <a:xfrm>
-            <a:off x="502920" y="3886200"/>
-            <a:ext cx="5486400" cy="2286000"/>
+            <a:off x="502920" y="3227832"/>
+            <a:ext cx="11183112" cy="1234440"/>
           </a:xfrm>
           <a:prstGeom prst="rect">
             <a:avLst/>
@@ -13332,14 +12242,14 @@
       </p:sp>
       <p:sp>
         <p:nvSpPr>
-          <p:cNvPr id="12" name="TextBox 11"/>
+          <p:cNvPr id="13" name="TextBox 12"/>
           <p:cNvSpPr txBox="1"/>
           <p:nvPr/>
         </p:nvSpPr>
         <p:spPr>
           <a:xfrm>
-            <a:off x="685800" y="4023360"/>
-            <a:ext cx="5120640" cy="228600"/>
+            <a:off x="694944" y="3392424"/>
+            <a:ext cx="1325880" cy="301752"/>
           </a:xfrm>
           <a:prstGeom prst="rect">
             <a:avLst/>
@@ -13356,7 +12266,7 @@
               <a:spcAft>
                 <a:spcPts val="600"/>
               </a:spcAft>
-              <a:defRPr sz="1100" b="1">
+              <a:defRPr sz="1600" b="1">
                 <a:solidFill>
                   <a:srgbClr val="24734A"/>
                 </a:solidFill>
@@ -13364,21 +12274,21 @@
               </a:defRPr>
             </a:pPr>
             <a:r>
-              <a:t>ENABLE / CONFIGURE</a:t>
-            </a:r>
-          </a:p>
-        </p:txBody>
-      </p:sp>
-      <p:sp>
-        <p:nvSpPr>
-          <p:cNvPr id="13" name="TextBox 12"/>
+              <a:t>02:00–03:30</a:t>
+            </a:r>
+          </a:p>
+        </p:txBody>
+      </p:sp>
+      <p:sp>
+        <p:nvSpPr>
+          <p:cNvPr id="14" name="TextBox 13"/>
           <p:cNvSpPr txBox="1"/>
           <p:nvPr/>
         </p:nvSpPr>
         <p:spPr>
           <a:xfrm>
-            <a:off x="685800" y="4389120"/>
-            <a:ext cx="5120640" cy="1673352"/>
+            <a:off x="2130552" y="3337560"/>
+            <a:ext cx="9281160" cy="301752"/>
           </a:xfrm>
           <a:prstGeom prst="rect">
             <a:avLst/>
@@ -13395,7 +12305,7 @@
               <a:spcAft>
                 <a:spcPts val="600"/>
               </a:spcAft>
-              <a:defRPr sz="2000" b="0">
+              <a:defRPr sz="2000" b="1">
                 <a:solidFill>
                   <a:srgbClr val="182D43"/>
                 </a:solidFill>
@@ -13403,15 +12313,38 @@
               </a:defRPr>
             </a:pPr>
             <a:r>
-              <a:t>1. Install the Security Agent Power.</a:t>
-            </a:r>
-          </a:p>
-          <a:p>
-            <a:pPr>
-              <a:spcAft>
-                <a:spcPts val="600"/>
-              </a:spcAft>
-              <a:defRPr sz="2000" b="0">
+              <a:t>Identify the application inputs</a:t>
+            </a:r>
+          </a:p>
+        </p:txBody>
+      </p:sp>
+      <p:sp>
+        <p:nvSpPr>
+          <p:cNvPr id="15" name="TextBox 14"/>
+          <p:cNvSpPr txBox="1"/>
+          <p:nvPr/>
+        </p:nvSpPr>
+        <p:spPr>
+          <a:xfrm>
+            <a:off x="2130552" y="3730752"/>
+            <a:ext cx="9189720" cy="621792"/>
+          </a:xfrm>
+          <a:prstGeom prst="rect">
+            <a:avLst/>
+          </a:prstGeom>
+          <a:noFill/>
+        </p:spPr>
+        <p:txBody>
+          <a:bodyPr wrap="square" lIns="0" rIns="0" tIns="0" bIns="0">
+            <a:spAutoFit/>
+          </a:bodyPr>
+          <a:lstStyle/>
+          <a:p>
+            <a:pPr>
+              <a:spcAft>
+                <a:spcPts val="600"/>
+              </a:spcAft>
+              <a:defRPr sz="1600" b="0">
                 <a:solidFill>
                   <a:srgbClr val="182D43"/>
                 </a:solidFill>
@@ -13419,37 +12352,21 @@
               </a:defRPr>
             </a:pPr>
             <a:r>
-              <a:t>2. Review profile and setup permissions.</a:t>
-            </a:r>
-          </a:p>
-          <a:p>
-            <a:pPr>
-              <a:spcAft>
-                <a:spcPts val="600"/>
-              </a:spcAft>
-              <a:defRPr sz="2000" b="0">
-                <a:solidFill>
-                  <a:srgbClr val="182D43"/>
-                </a:solidFill>
-                <a:latin typeface="Aptos"/>
-              </a:defRPr>
-            </a:pPr>
-            <a:r>
-              <a:t>3. Inspect the provisioned resources.</a:t>
-            </a:r>
-          </a:p>
-        </p:txBody>
-      </p:sp>
-      <p:sp>
-        <p:nvSpPr>
-          <p:cNvPr id="14" name="Rectangle 13"/>
+              <a:t>Select context at a known source and deployment revision. Gate: Context-to-target revision match.</a:t>
+            </a:r>
+          </a:p>
+        </p:txBody>
+      </p:sp>
+      <p:sp>
+        <p:nvSpPr>
+          <p:cNvPr id="16" name="Rectangle 15"/>
           <p:cNvSpPr/>
           <p:nvPr/>
         </p:nvSpPr>
         <p:spPr>
           <a:xfrm>
-            <a:off x="6199632" y="1810512"/>
-            <a:ext cx="5486400" cy="1929384"/>
+            <a:off x="502920" y="4626864"/>
+            <a:ext cx="11183112" cy="1234440"/>
           </a:xfrm>
           <a:prstGeom prst="rect">
             <a:avLst/>
@@ -13485,14 +12402,14 @@
       </p:sp>
       <p:sp>
         <p:nvSpPr>
-          <p:cNvPr id="15" name="TextBox 14"/>
+          <p:cNvPr id="17" name="TextBox 16"/>
           <p:cNvSpPr txBox="1"/>
           <p:nvPr/>
         </p:nvSpPr>
         <p:spPr>
           <a:xfrm>
-            <a:off x="6382512" y="1947672"/>
-            <a:ext cx="5120640" cy="228600"/>
+            <a:off x="694944" y="4791456"/>
+            <a:ext cx="1325880" cy="301752"/>
           </a:xfrm>
           <a:prstGeom prst="rect">
             <a:avLst/>
@@ -13509,7 +12426,7 @@
               <a:spcAft>
                 <a:spcPts val="600"/>
               </a:spcAft>
-              <a:defRPr sz="1100" b="1">
+              <a:defRPr sz="1600" b="1">
                 <a:solidFill>
                   <a:srgbClr val="24734A"/>
                 </a:solidFill>
@@ -13517,21 +12434,21 @@
               </a:defRPr>
             </a:pPr>
             <a:r>
-              <a:t>INDEPENDENT CHECK — PROPOSED</a:t>
-            </a:r>
-          </a:p>
-        </p:txBody>
-      </p:sp>
-      <p:sp>
-        <p:nvSpPr>
-          <p:cNvPr id="16" name="TextBox 15"/>
+              <a:t>03:30–05:30</a:t>
+            </a:r>
+          </a:p>
+        </p:txBody>
+      </p:sp>
+      <p:sp>
+        <p:nvSpPr>
+          <p:cNvPr id="18" name="TextBox 17"/>
           <p:cNvSpPr txBox="1"/>
           <p:nvPr/>
         </p:nvSpPr>
         <p:spPr>
           <a:xfrm>
-            <a:off x="6382512" y="2313432"/>
-            <a:ext cx="5120640" cy="1316736"/>
+            <a:off x="2130552" y="4736592"/>
+            <a:ext cx="9281160" cy="301752"/>
           </a:xfrm>
           <a:prstGeom prst="rect">
             <a:avLst/>
@@ -13548,7 +12465,7 @@
               <a:spcAft>
                 <a:spcPts val="600"/>
               </a:spcAft>
-              <a:defRPr sz="1900" b="0">
+              <a:defRPr sz="2000" b="1">
                 <a:solidFill>
                   <a:srgbClr val="182D43"/>
                 </a:solidFill>
@@ -13556,64 +12473,21 @@
               </a:defRPr>
             </a:pPr>
             <a:r>
-              <a:t>Confirm bucket, role, scan ID and source revision; inspect generated fixes before committing.</a:t>
-            </a:r>
-          </a:p>
-        </p:txBody>
-      </p:sp>
-      <p:sp>
-        <p:nvSpPr>
-          <p:cNvPr id="17" name="Rectangle 16"/>
-          <p:cNvSpPr/>
-          <p:nvPr/>
-        </p:nvSpPr>
-        <p:spPr>
-          <a:xfrm>
-            <a:off x="6199632" y="3886200"/>
-            <a:ext cx="5486400" cy="2286000"/>
-          </a:xfrm>
-          <a:prstGeom prst="rect">
-            <a:avLst/>
-          </a:prstGeom>
-          <a:solidFill>
-            <a:srgbClr val="F1F5F9"/>
-          </a:solidFill>
-          <a:ln>
-            <a:noFill/>
-          </a:ln>
-        </p:spPr>
-        <p:style>
-          <a:lnRef idx="1">
-            <a:schemeClr val="accent1"/>
-          </a:lnRef>
-          <a:fillRef idx="3">
-            <a:schemeClr val="accent1"/>
-          </a:fillRef>
-          <a:effectRef idx="2">
-            <a:schemeClr val="accent1"/>
-          </a:effectRef>
-          <a:fontRef idx="minor">
-            <a:schemeClr val="lt1"/>
-          </a:fontRef>
-        </p:style>
-        <p:txBody>
-          <a:bodyPr rtlCol="0" anchor="ctr"/>
-          <a:lstStyle/>
-          <a:p>
-            <a:pPr algn="ctr"/>
-          </a:p>
-        </p:txBody>
-      </p:sp>
-      <p:sp>
-        <p:nvSpPr>
-          <p:cNvPr id="18" name="TextBox 17"/>
+              <a:t>Review one finding</a:t>
+            </a:r>
+          </a:p>
+        </p:txBody>
+      </p:sp>
+      <p:sp>
+        <p:nvSpPr>
+          <p:cNvPr id="19" name="TextBox 18"/>
           <p:cNvSpPr txBox="1"/>
           <p:nvPr/>
         </p:nvSpPr>
         <p:spPr>
           <a:xfrm>
-            <a:off x="6382512" y="4023360"/>
-            <a:ext cx="5120640" cy="228600"/>
+            <a:off x="2130552" y="5129784"/>
+            <a:ext cx="9189720" cy="621792"/>
           </a:xfrm>
           <a:prstGeom prst="rect">
             <a:avLst/>
@@ -13630,46 +12504,7 @@
               <a:spcAft>
                 <a:spcPts val="600"/>
               </a:spcAft>
-              <a:defRPr sz="1100" b="1">
-                <a:solidFill>
-                  <a:srgbClr val="24734A"/>
-                </a:solidFill>
-                <a:latin typeface="Aptos"/>
-              </a:defRPr>
-            </a:pPr>
-            <a:r>
-              <a:t>CONTROL AND LIMITATION</a:t>
-            </a:r>
-          </a:p>
-        </p:txBody>
-      </p:sp>
-      <p:sp>
-        <p:nvSpPr>
-          <p:cNvPr id="19" name="TextBox 18"/>
-          <p:cNvSpPr txBox="1"/>
-          <p:nvPr/>
-        </p:nvSpPr>
-        <p:spPr>
-          <a:xfrm>
-            <a:off x="6382512" y="4389120"/>
-            <a:ext cx="5120640" cy="1673352"/>
-          </a:xfrm>
-          <a:prstGeom prst="rect">
-            <a:avLst/>
-          </a:prstGeom>
-          <a:noFill/>
-        </p:spPr>
-        <p:txBody>
-          <a:bodyPr wrap="square" lIns="0" rIns="0" tIns="0" bIns="0">
-            <a:spAutoFit/>
-          </a:bodyPr>
-          <a:lstStyle/>
-          <a:p>
-            <a:pPr>
-              <a:spcAft>
-                <a:spcPts val="600"/>
-              </a:spcAft>
-              <a:defRPr sz="2000" b="0">
+              <a:defRPr sz="1600" b="0">
                 <a:solidFill>
                   <a:srgbClr val="182D43"/>
                 </a:solidFill>
@@ -13677,46 +12512,7 @@
               </a:defRPr>
             </a:pPr>
             <a:r>
-              <a:t>A diff scan can upload full context. Review installed hooks and MCP tools; remove or disable the integration when access is no longer approved.</a:t>
-            </a:r>
-          </a:p>
-        </p:txBody>
-      </p:sp>
-      <p:sp>
-        <p:nvSpPr>
-          <p:cNvPr id="20" name="TextBox 19"/>
-          <p:cNvSpPr txBox="1"/>
-          <p:nvPr/>
-        </p:nvSpPr>
-        <p:spPr>
-          <a:xfrm>
-            <a:off x="594360" y="6236208"/>
-            <a:ext cx="10972800" cy="182880"/>
-          </a:xfrm>
-          <a:prstGeom prst="rect">
-            <a:avLst/>
-          </a:prstGeom>
-          <a:noFill/>
-        </p:spPr>
-        <p:txBody>
-          <a:bodyPr wrap="square" lIns="0" rIns="0" tIns="0" bIns="0">
-            <a:spAutoFit/>
-          </a:bodyPr>
-          <a:lstStyle/>
-          <a:p>
-            <a:pPr>
-              <a:spcAft>
-                <a:spcPts val="600"/>
-              </a:spcAft>
-              <a:defRPr sz="900" b="0">
-                <a:solidFill>
-                  <a:srgbClr val="52657A"/>
-                </a:solidFill>
-                <a:latin typeface="Aptos"/>
-              </a:defRPr>
-            </a:pPr>
-            <a:r>
-              <a:t>Official sources: SI, KC, SB · Kiro Power / supported IDE integration</a:t>
+              <a:t>Inspect evidence, confidence and reproducibility. Gate: Safe reproduction or an explicit inconclusive result.</a:t>
             </a:r>
           </a:p>
         </p:txBody>
@@ -13824,7 +12620,7 @@
               </a:defRPr>
             </a:pPr>
             <a:r>
-              <a:t>OPTIONAL 12-MINUTE EXERCISE / PART 1 OF 2</a:t>
+              <a:t>OPTIONAL 12-MINUTE EXERCISE / PART 2 OF 2</a:t>
             </a:r>
           </a:p>
         </p:txBody>
@@ -14066,7 +12862,7 @@
               </a:defRPr>
             </a:pPr>
             <a:r>
-              <a:t>00:00–02:00</a:t>
+              <a:t>05:30–07:30</a:t>
             </a:r>
           </a:p>
         </p:txBody>
@@ -14105,7 +12901,7 @@
               </a:defRPr>
             </a:pPr>
             <a:r>
-              <a:t>Fix the authorization boundary</a:t>
+              <a:t>Inspect remediation setup</a:t>
             </a:r>
           </a:p>
         </p:txBody>
@@ -14144,7 +12940,7 @@
               </a:defRPr>
             </a:pPr>
             <a:r>
-              <a:t>Identify the test target, identities, exclusions and stop owner. Gate: Written scope and approved test roles.</a:t>
+              <a:t>Check per-repository enablement and inspect the proposed repair. Gate: Finding-linked PR, no merge implied.</a:t>
             </a:r>
           </a:p>
         </p:txBody>
@@ -14226,7 +13022,7 @@
               </a:defRPr>
             </a:pPr>
             <a:r>
-              <a:t>02:00–03:30</a:t>
+              <a:t>07:30–09:00</a:t>
             </a:r>
           </a:p>
         </p:txBody>
@@ -14265,7 +13061,7 @@
               </a:defRPr>
             </a:pPr>
             <a:r>
-              <a:t>Identify the application inputs</a:t>
+              <a:t>Verify the deployed version</a:t>
             </a:r>
           </a:p>
         </p:txBody>
@@ -14304,7 +13100,7 @@
               </a:defRPr>
             </a:pPr>
             <a:r>
-              <a:t>Select context at a known source and deployment revision. Gate: Context-to-target revision match.</a:t>
+              <a:t>Use the normal change process and confirm the staging commit. Gate: Independent tests and deployed revision recorded.</a:t>
             </a:r>
           </a:p>
         </p:txBody>
@@ -14386,7 +13182,7 @@
               </a:defRPr>
             </a:pPr>
             <a:r>
-              <a:t>03:30–05:30</a:t>
+              <a:t>09:00–12:00</a:t>
             </a:r>
           </a:p>
         </p:txBody>
@@ -14425,7 +13221,7 @@
               </a:defRPr>
             </a:pPr>
             <a:r>
-              <a:t>Review one finding</a:t>
+              <a:t>Revalidate and record residual risk</a:t>
             </a:r>
           </a:p>
         </p:txBody>
@@ -14464,7 +13260,7 @@
               </a:defRPr>
             </a:pPr>
             <a:r>
-              <a:t>Inspect evidence, confidence and reproducibility. Gate: Safe reproduction or an explicit inconclusive result.</a:t>
+              <a:t>Review the targeted revalidation job and original finding together. Gate: Reachable target, correct identity and evidence for the result.</a:t>
             </a:r>
           </a:p>
         </p:txBody>
